--- a/docs/pptx/carbo/ritu-carbo-adjcif-aki2.pptx
+++ b/docs/pptx/carbo/ritu-carbo-adjcif-aki2.pptx
@@ -2271,7 +2271,7 @@
           </p:nvSpPr>
           <p:spPr>
             <a:xfrm>
-              <a:off x="972874" y="5132856"/>
+              <a:off x="972874" y="5135212"/>
               <a:ext cx="7644336" cy="0"/>
             </a:xfrm>
             <a:custGeom>
@@ -2314,7 +2314,7 @@
           </p:nvSpPr>
           <p:spPr>
             <a:xfrm>
-              <a:off x="972874" y="4237725"/>
+              <a:off x="972874" y="4244792"/>
               <a:ext cx="7644336" cy="0"/>
             </a:xfrm>
             <a:custGeom>
@@ -2357,7 +2357,7 @@
           </p:nvSpPr>
           <p:spPr>
             <a:xfrm>
-              <a:off x="972874" y="3342593"/>
+              <a:off x="972874" y="3354372"/>
               <a:ext cx="7644336" cy="0"/>
             </a:xfrm>
             <a:custGeom>
@@ -2615,7 +2615,7 @@
           </p:nvSpPr>
           <p:spPr>
             <a:xfrm>
-              <a:off x="972874" y="4685290"/>
+              <a:off x="972874" y="4690002"/>
               <a:ext cx="7644336" cy="0"/>
             </a:xfrm>
             <a:custGeom>
@@ -2658,7 +2658,7 @@
           </p:nvSpPr>
           <p:spPr>
             <a:xfrm>
-              <a:off x="972874" y="3790159"/>
+              <a:off x="972874" y="3799582"/>
               <a:ext cx="7644336" cy="0"/>
             </a:xfrm>
             <a:custGeom>
@@ -2701,7 +2701,7 @@
           </p:nvSpPr>
           <p:spPr>
             <a:xfrm>
-              <a:off x="972874" y="2895027"/>
+              <a:off x="972874" y="2909162"/>
               <a:ext cx="7644336" cy="0"/>
             </a:xfrm>
             <a:custGeom>
@@ -2960,10 +2960,10 @@
                     <a:pt x="6345101" y="669533"/>
                   </a:lnTo>
                   <a:lnTo>
-                    <a:pt x="6345101" y="443279"/>
-                  </a:lnTo>
-                  <a:lnTo>
-                    <a:pt x="6949396" y="443279"/>
+                    <a:pt x="6345101" y="443278"/>
+                  </a:lnTo>
+                  <a:lnTo>
+                    <a:pt x="6949396" y="443278"/>
                   </a:lnTo>
                   <a:lnTo>
                     <a:pt x="6949396" y="0"/>
@@ -3021,10 +3021,10 @@
                     <a:pt x="4834363" y="1815582"/>
                   </a:lnTo>
                   <a:lnTo>
-                    <a:pt x="4834363" y="1514543"/>
-                  </a:lnTo>
-                  <a:lnTo>
-                    <a:pt x="5539374" y="1514543"/>
+                    <a:pt x="4834363" y="1514542"/>
+                  </a:lnTo>
+                  <a:lnTo>
+                    <a:pt x="5539374" y="1514542"/>
                   </a:lnTo>
                   <a:lnTo>
                     <a:pt x="5539374" y="1196730"/>
@@ -3120,7 +3120,7 @@
           </p:nvSpPr>
           <p:spPr>
             <a:xfrm>
-              <a:off x="692708" y="4645240"/>
+              <a:off x="692708" y="4649951"/>
               <a:ext cx="217535" cy="80101"/>
             </a:xfrm>
             <a:prstGeom prst="rect">
@@ -3166,7 +3166,7 @@
           </p:nvSpPr>
           <p:spPr>
             <a:xfrm>
-              <a:off x="692708" y="3750108"/>
+              <a:off x="692708" y="3759531"/>
               <a:ext cx="217535" cy="80101"/>
             </a:xfrm>
             <a:prstGeom prst="rect">
@@ -3212,7 +3212,7 @@
           </p:nvSpPr>
           <p:spPr>
             <a:xfrm>
-              <a:off x="692708" y="2854977"/>
+              <a:off x="692708" y="2869111"/>
               <a:ext cx="217535" cy="80101"/>
             </a:xfrm>
             <a:prstGeom prst="rect">
